--- a/dataset/guides/SYS/manual/IT-SYS-003-M_사내 시스템 장애 신고·이관 처리 매뉴얼.pptx
+++ b/dataset/guides/SYS/manual/IT-SYS-003-M_사내 시스템 장애 신고·이관 처리 매뉴얼.pptx
@@ -10926,7 +10926,7 @@
                 <a:ea typeface="맑은 고딕" pitchFamily="34" charset="-122"/>
                 <a:cs typeface="맑은 고딕" pitchFamily="34" charset="-120"/>
               </a:rPr>
-              <a:t>※ 이렇게 말하면 됩니다: "영업기획팀 김하늘입니다. ERP가 10시부터 로딩만 되고 저장이 안 됩니다. 우리 팀과 재무팀이 모두 같습니다. 오늘 마감 작업이 있습니다."</a:t>
+              <a:t>※ 이렇게 말하면 됩니다: "영업기획팀 김하늘입니다. ERP가 10시부터 로딩만 되고 저장이 안 됩니다. 우리 팀과 다른 팀도 모두 같습니다. 오늘 마감 작업이 있습니다."</a:t>
             </a:r>
             <a:endParaRPr lang="en-US" sz="1000" dirty="0"/>
           </a:p>
